--- a/Präsentation/WealthScope_Poster_A3.pptx
+++ b/Präsentation/WealthScope_Poster_A3.pptx
@@ -2230,7 +2230,7 @@
                 <a:ea typeface="Cambria" pitchFamily="34" charset="-122"/>
                 <a:cs typeface="Cambria" pitchFamily="34" charset="-120"/>
               </a:rPr>
-              <a:t>55,3 %</a:t>
+              <a:t>51,9 %</a:t>
             </a:r>
             <a:endParaRPr lang="en-US" sz="2500" dirty="0"/>
           </a:p>
@@ -2337,7 +2337,7 @@
                 <a:ea typeface="Cambria" pitchFamily="34" charset="-122"/>
                 <a:cs typeface="Cambria" pitchFamily="34" charset="-120"/>
               </a:rPr>
-              <a:t>0,588</a:t>
+              <a:t>0,519</a:t>
             </a:r>
             <a:endParaRPr lang="en-US" sz="2500" dirty="0"/>
           </a:p>
@@ -2376,7 +2376,7 @@
                 <a:ea typeface="Calibri" pitchFamily="34" charset="-122"/>
                 <a:cs typeface="Calibri" pitchFamily="34" charset="-120"/>
               </a:rPr>
-              <a:t>ROC-AUC ★</a:t>
+              <a:t>ROC-AUC (Out-of-Time)</a:t>
             </a:r>
             <a:endParaRPr lang="en-US" sz="1050" dirty="0"/>
           </a:p>
@@ -2553,16 +2553,17 @@
       </p:sp>
       <p:pic>
         <p:nvPicPr>
-          <p:cNvPr id="49" name="Image 2" descr="/private/tmp/claude-501/-Users-soufianefed-Desktop-SosoSignalBot/fd57b771-7fec-4f60-a214-d2b5ebb5bd05/scratchpad/pptx_build/shots/chart_konfusion.png">    </p:cNvPr>
+          <p:cNvPr id="65" name="Picture 64" descr="poster_confusion_matrix.png"/>
           <p:cNvPicPr>
             <a:picLocks noChangeAspect="1"/>
           </p:cNvPicPr>
           <p:nvPr/>
         </p:nvPicPr>
         <p:blipFill>
-          <a:blip r:embed="rId3"/>
-          <a:srcRect l="0" r="0" t="0" b="0"/>
-          <a:stretch/>
+          <a:blip r:embed="rId8"/>
+          <a:stretch>
+            <a:fillRect/>
+          </a:stretch>
         </p:blipFill>
         <p:spPr>
           <a:xfrm>
@@ -2649,16 +2650,17 @@
       </p:sp>
       <p:pic>
         <p:nvPicPr>
-          <p:cNvPr id="52" name="Image 3" descr="/private/tmp/claude-501/-Users-soufianefed-Desktop-SosoSignalBot/fd57b771-7fec-4f60-a214-d2b5ebb5bd05/scratchpad/pptx_build/shots/chart_lernkurve.png">    </p:cNvPr>
+          <p:cNvPr id="64" name="Picture 63" descr="poster_learning_curve.png"/>
           <p:cNvPicPr>
             <a:picLocks noChangeAspect="1"/>
           </p:cNvPicPr>
           <p:nvPr/>
         </p:nvPicPr>
         <p:blipFill>
-          <a:blip r:embed="rId4"/>
-          <a:srcRect l="0" r="0" t="0" b="0"/>
-          <a:stretch/>
+          <a:blip r:embed="rId7"/>
+          <a:stretch>
+            <a:fillRect/>
+          </a:stretch>
         </p:blipFill>
         <p:spPr>
           <a:xfrm>
@@ -2703,7 +2705,7 @@
                 <a:ea typeface="Calibri" pitchFamily="34" charset="-122"/>
                 <a:cs typeface="Calibri" pitchFamily="34" charset="-120"/>
               </a:rPr>
-              <a:t>Abb. 3: Lernkurve (ROC-AUC vs. Trainingsgröße, 5-Fold CV) — Quelle: eigene Berechnung</a:t>
+              <a:t>Abb. 3: Lernkurve (ROC-AUC vs. Trainingsgröße, 4 expandierende Walk-forward-Folds) — Quelle: eigene Berechnung</a:t>
             </a:r>
             <a:endParaRPr lang="en-US" sz="900" dirty="0"/>
           </a:p>
@@ -2764,7 +2766,7 @@
                 <a:ea typeface="Calibri" pitchFamily="34" charset="-122"/>
                 <a:cs typeface="Calibri" pitchFamily="34" charset="-120"/>
               </a:rPr>
-              <a:t>Warum 55,3 % kein schlechtes Ergebnis sind.  </a:t>
+              <a:t>Warum 51,9 % das ehrliche Ergebnis ist.  </a:t>
             </a:r>
             <a:pPr indent="0" marL="0">
               <a:buNone/>
@@ -2778,7 +2780,7 @@
                 <a:ea typeface="Calibri" pitchFamily="34" charset="-122"/>
                 <a:cs typeface="Calibri" pitchFamily="34" charset="-120"/>
               </a:rPr>
-              <a:t>Nach der Efficient Market Hypothesis (Fama 1970) ist bei rein historischen Kursdaten eine Präzision knapp über 50 % das wissenschaftlich Erwartete. Ein Modell mit 55,3 %, das seine Grenzen kennt und erklärt (SHAP, Lernkurve), ist wertvoller als ein undurchsichtiges mit 95 %.</a:t>
+              <a:t>Der Test ist zeitlich unangetastet: Training bis 2006, Prüfung auf 2006–2017, dazwischen 20 Handelstage Sperrzone. So bleibt die Accuracy unter der Mehrheitsbaseline von 59,1 % und der ROC-AUC bei 0,519 — H1 ist damit falsifiziert, nicht ungeprüft. Genau das erwartet die Effizienzmarkthypothese (Fama 1970). Ein naiver Zufalls-Split bewertet dieselben Daten mit 0,581: ein 4,2-mal größeres scheinbares Signal.</a:t>
             </a:r>
             <a:endParaRPr lang="en-US" sz="1250" dirty="0"/>
           </a:p>
@@ -2883,7 +2885,7 @@
                 <a:ea typeface="Calibri" pitchFamily="34" charset="-122"/>
                 <a:cs typeface="Calibri" pitchFamily="34" charset="-120"/>
               </a:rPr>
-              <a:t>RandomForest (Pipeline: Impute → Scale → RF), 5-Fold Stratified CV, StandardScaler nur auf Trainingsdaten (kein Data Leakage). 8 Features aus OHLCV, Ziel target_20d (Kurs in 20 Tagen höher?).</a:t>
+              <a:t>RandomForest (Median-Imputer → RF; StandardScaler nur bei LogReg und Linear SVM, Bäume sind skaleninvariant). Purged Out-of-Time-Test plus 4 expandierende Walk-forward-Folds, alles nur im Trainingsfenster gefittet. 8 Features aus OHLCV, Ziel target_20d.</a:t>
             </a:r>
             <a:endParaRPr lang="en-US" sz="1100" dirty="0"/>
           </a:p>
